--- a/material/4_WEB/04_react(2).pptx
+++ b/material/4_WEB/04_react(2).pptx
@@ -5,7 +5,7 @@
     <p:sldMasterId id="2147483660" r:id="rId1"/>
   </p:sldMasterIdLst>
   <p:notesMasterIdLst>
-    <p:notesMasterId r:id="rId70"/>
+    <p:notesMasterId r:id="rId71"/>
   </p:notesMasterIdLst>
   <p:sldIdLst>
     <p:sldId id="1388" r:id="rId2"/>
@@ -75,7 +75,8 @@
     <p:sldId id="611" r:id="rId66"/>
     <p:sldId id="614" r:id="rId67"/>
     <p:sldId id="615" r:id="rId68"/>
-    <p:sldId id="813" r:id="rId69"/>
+    <p:sldId id="625" r:id="rId69"/>
+    <p:sldId id="813" r:id="rId70"/>
   </p:sldIdLst>
   <p:sldSz cx="12192000" cy="6858000"/>
   <p:notesSz cx="6858000" cy="9144000"/>
@@ -285,7 +286,7 @@
             <a:fld id="{A13A867C-D490-40C2-AB8D-A60FA70A9BF5}" type="datetimeFigureOut">
               <a:rPr lang="ko-KR" altLang="en-US" smtClean="0"/>
               <a:pPr/>
-              <a:t>2026-01-06</a:t>
+              <a:t>2026-02-09</a:t>
             </a:fld>
             <a:endParaRPr lang="ko-KR" altLang="en-US" dirty="0"/>
           </a:p>
@@ -5040,6 +5041,94 @@
   <p:cSld>
     <p:spTree>
       <p:nvGrpSpPr>
+        <p:cNvPr id="1" name=""/>
+        <p:cNvGrpSpPr/>
+        <p:nvPr/>
+      </p:nvGrpSpPr>
+      <p:grpSpPr>
+        <a:xfrm>
+          <a:off x="0" y="0"/>
+          <a:ext cx="0" cy="0"/>
+          <a:chOff x="0" y="0"/>
+          <a:chExt cx="0" cy="0"/>
+        </a:xfrm>
+      </p:grpSpPr>
+      <p:sp>
+        <p:nvSpPr>
+          <p:cNvPr id="2" name="슬라이드 이미지 개체 틀 1"/>
+          <p:cNvSpPr>
+            <a:spLocks noGrp="1" noRot="1" noChangeAspect="1"/>
+          </p:cNvSpPr>
+          <p:nvPr>
+            <p:ph type="sldImg"/>
+          </p:nvPr>
+        </p:nvSpPr>
+        <p:spPr/>
+      </p:sp>
+      <p:sp>
+        <p:nvSpPr>
+          <p:cNvPr id="3" name="슬라이드 노트 개체 틀 2"/>
+          <p:cNvSpPr>
+            <a:spLocks noGrp="1"/>
+          </p:cNvSpPr>
+          <p:nvPr>
+            <p:ph type="body" idx="1"/>
+          </p:nvPr>
+        </p:nvSpPr>
+        <p:spPr/>
+        <p:txBody>
+          <a:bodyPr/>
+          <a:lstStyle/>
+          <a:p>
+            <a:r>
+              <a:rPr lang="en-US" altLang="ko-KR" dirty="0"/>
+              <a:t>09_router</a:t>
+            </a:r>
+            <a:endParaRPr lang="ko-KR" altLang="en-US" dirty="0"/>
+          </a:p>
+        </p:txBody>
+      </p:sp>
+      <p:sp>
+        <p:nvSpPr>
+          <p:cNvPr id="4" name="슬라이드 번호 개체 틀 3"/>
+          <p:cNvSpPr>
+            <a:spLocks noGrp="1"/>
+          </p:cNvSpPr>
+          <p:nvPr>
+            <p:ph type="sldNum" sz="quarter" idx="5"/>
+          </p:nvPr>
+        </p:nvSpPr>
+        <p:spPr/>
+        <p:txBody>
+          <a:bodyPr/>
+          <a:lstStyle/>
+          <a:p>
+            <a:fld id="{C09E5BFC-1559-42F1-8940-AB342D56BF02}" type="slidenum">
+              <a:rPr lang="ko-KR" altLang="en-US" smtClean="0"/>
+              <a:t>68</a:t>
+            </a:fld>
+            <a:endParaRPr lang="ko-KR" altLang="en-US"/>
+          </a:p>
+        </p:txBody>
+      </p:sp>
+    </p:spTree>
+    <p:extLst>
+      <p:ext uri="{BB962C8B-B14F-4D97-AF65-F5344CB8AC3E}">
+        <p14:creationId xmlns:p14="http://schemas.microsoft.com/office/powerpoint/2010/main" val="1720277858"/>
+      </p:ext>
+    </p:extLst>
+  </p:cSld>
+  <p:clrMapOvr>
+    <a:masterClrMapping/>
+  </p:clrMapOvr>
+</p:notes>
+</file>
+
+<file path=ppt/notesSlides/notesSlide56.xml><?xml version="1.0" encoding="utf-8"?>
+<p:notes xmlns:a="http://schemas.openxmlformats.org/drawingml/2006/main" xmlns:r="http://schemas.openxmlformats.org/officeDocument/2006/relationships" xmlns:p="http://schemas.openxmlformats.org/presentationml/2006/main">
+  <p:cSld>
+    <p:spTree>
+      <p:nvGrpSpPr>
         <p:cNvPr id="1" name="">
           <a:extLst>
             <a:ext uri="{FF2B5EF4-FFF2-40B4-BE49-F238E27FC236}">
@@ -5124,7 +5213,7 @@
           <a:p>
             <a:fld id="{A0085365-8376-4996-BDD6-F39608FADAF3}" type="slidenum">
               <a:rPr lang="ko-KR" altLang="en-US" smtClean="0"/>
-              <a:t>68</a:t>
+              <a:t>69</a:t>
             </a:fld>
             <a:endParaRPr lang="ko-KR" altLang="en-US"/>
           </a:p>
@@ -5638,7 +5727,7 @@
           <a:p>
             <a:fld id="{442BEE3F-2E9A-4FD8-8B8A-8619F3E161C0}" type="datetime1">
               <a:rPr lang="ko-KR" altLang="en-US" smtClean="0"/>
-              <a:t>2026-01-06</a:t>
+              <a:t>2026-02-09</a:t>
             </a:fld>
             <a:endParaRPr lang="ko-KR" altLang="en-US"/>
           </a:p>
@@ -5925,7 +6014,7 @@
           <a:p>
             <a:fld id="{0F78D9C4-20C1-4B15-A116-16DC77AD9A1E}" type="datetime1">
               <a:rPr lang="ko-KR" altLang="en-US" smtClean="0"/>
-              <a:t>2026-01-06</a:t>
+              <a:t>2026-02-09</a:t>
             </a:fld>
             <a:endParaRPr lang="ko-KR" altLang="en-US"/>
           </a:p>
@@ -6100,7 +6189,7 @@
           <a:p>
             <a:fld id="{7F5E23C3-0E3D-4E4E-8486-D7FB4C073DC1}" type="datetime1">
               <a:rPr lang="ko-KR" altLang="en-US" smtClean="0"/>
-              <a:t>2026-01-06</a:t>
+              <a:t>2026-02-09</a:t>
             </a:fld>
             <a:endParaRPr lang="ko-KR" altLang="en-US"/>
           </a:p>
@@ -6213,7 +6302,7 @@
           <a:p>
             <a:fld id="{0E19CB95-6D28-40F1-9DA3-1BAC5D4B5B4F}" type="datetime6">
               <a:rPr lang="ko-KR" altLang="en-US" smtClean="0"/>
-              <a:t>2026년 1월</a:t>
+              <a:t>2026년 2월</a:t>
             </a:fld>
             <a:endParaRPr lang="ko-KR" altLang="en-US"/>
           </a:p>
@@ -6634,7 +6723,7 @@
           <a:p>
             <a:fld id="{7F5E23C3-0E3D-4E4E-8486-D7FB4C073DC1}" type="datetime1">
               <a:rPr lang="ko-KR" altLang="en-US" smtClean="0"/>
-              <a:t>2026-01-06</a:t>
+              <a:t>2026-02-09</a:t>
             </a:fld>
             <a:endParaRPr lang="ko-KR" altLang="en-US"/>
           </a:p>
@@ -7597,7 +7686,7 @@
           <a:p>
             <a:fld id="{BD660D5C-6858-45BD-B9C9-03C5FB5E96FA}" type="datetime6">
               <a:rPr lang="ko-KR" altLang="en-US" smtClean="0"/>
-              <a:t>2026년 1월</a:t>
+              <a:t>2026년 2월</a:t>
             </a:fld>
             <a:endParaRPr lang="ko-KR" altLang="en-US"/>
           </a:p>
@@ -8034,7 +8123,7 @@
           <a:p>
             <a:fld id="{1140E07E-9745-4A1E-87D3-F87BED6F3F73}" type="datetime6">
               <a:rPr lang="ko-KR" altLang="en-US" smtClean="0"/>
-              <a:t>2026년 1월</a:t>
+              <a:t>2026년 2월</a:t>
             </a:fld>
             <a:endParaRPr lang="ko-KR" altLang="en-US"/>
           </a:p>
@@ -8316,7 +8405,7 @@
           <a:p>
             <a:fld id="{499F60AA-9663-4C10-96A7-DFE487A1DFF7}" type="datetime6">
               <a:rPr lang="ko-KR" altLang="en-US" smtClean="0"/>
-              <a:t>2026년 1월</a:t>
+              <a:t>2026년 2월</a:t>
             </a:fld>
             <a:endParaRPr lang="ko-KR" altLang="en-US"/>
           </a:p>
@@ -8513,7 +8602,7 @@
           <a:p>
             <a:fld id="{499F60AA-9663-4C10-96A7-DFE487A1DFF7}" type="datetime6">
               <a:rPr lang="ko-KR" altLang="en-US" smtClean="0"/>
-              <a:t>2026년 1월</a:t>
+              <a:t>2026년 2월</a:t>
             </a:fld>
             <a:endParaRPr lang="ko-KR" altLang="en-US"/>
           </a:p>
@@ -8770,7 +8859,7 @@
           <a:p>
             <a:fld id="{499F60AA-9663-4C10-96A7-DFE487A1DFF7}" type="datetime6">
               <a:rPr lang="ko-KR" altLang="en-US" smtClean="0"/>
-              <a:t>2026년 1월</a:t>
+              <a:t>2026년 2월</a:t>
             </a:fld>
             <a:endParaRPr lang="ko-KR" altLang="en-US"/>
           </a:p>
@@ -9072,7 +9161,7 @@
           <a:p>
             <a:fld id="{0E19CB95-6D28-40F1-9DA3-1BAC5D4B5B4F}" type="datetime6">
               <a:rPr lang="ko-KR" altLang="en-US" smtClean="0"/>
-              <a:t>2026년 1월</a:t>
+              <a:t>2026년 2월</a:t>
             </a:fld>
             <a:endParaRPr lang="ko-KR" altLang="en-US"/>
           </a:p>
@@ -9290,7 +9379,7 @@
           <a:p>
             <a:fld id="{ECE2EEAA-2D64-41F3-9CC6-1D2C9158BEA1}" type="datetime6">
               <a:rPr lang="ko-KR" altLang="en-US" smtClean="0"/>
-              <a:t>2026년 1월</a:t>
+              <a:t>2026년 2월</a:t>
             </a:fld>
             <a:endParaRPr lang="ko-KR" altLang="en-US" dirty="0"/>
           </a:p>
@@ -9410,7 +9499,7 @@
           <a:p>
             <a:fld id="{46B2C582-12D8-4D41-A2C5-A40388E0E0C0}" type="datetime6">
               <a:rPr lang="ko-KR" altLang="en-US" smtClean="0"/>
-              <a:t>2026년 1월</a:t>
+              <a:t>2026년 2월</a:t>
             </a:fld>
             <a:endParaRPr lang="ko-KR" altLang="en-US"/>
           </a:p>
@@ -9620,7 +9709,7 @@
           <a:p>
             <a:fld id="{8A388F0C-5E74-4ECC-96D5-84470E352FFC}" type="datetime6">
               <a:rPr lang="ko-KR" altLang="en-US" smtClean="0"/>
-              <a:t>2026년 1월</a:t>
+              <a:t>2026년 2월</a:t>
             </a:fld>
             <a:endParaRPr lang="ko-KR" altLang="en-US"/>
           </a:p>
@@ -9770,7 +9859,7 @@
           <a:p>
             <a:fld id="{499F60AA-9663-4C10-96A7-DFE487A1DFF7}" type="datetime6">
               <a:rPr lang="ko-KR" altLang="en-US" smtClean="0"/>
-              <a:t>2026년 1월</a:t>
+              <a:t>2026년 2월</a:t>
             </a:fld>
             <a:endParaRPr lang="ko-KR" altLang="en-US"/>
           </a:p>
@@ -10135,7 +10224,7 @@
           <a:p>
             <a:fld id="{0E19CB95-6D28-40F1-9DA3-1BAC5D4B5B4F}" type="datetime6">
               <a:rPr lang="ko-KR" altLang="en-US" smtClean="0"/>
-              <a:t>2026년 1월</a:t>
+              <a:t>2026년 2월</a:t>
             </a:fld>
             <a:endParaRPr lang="ko-KR" altLang="en-US"/>
           </a:p>
@@ -10260,7 +10349,7 @@
           <a:p>
             <a:fld id="{0F78D9C4-20C1-4B15-A116-16DC77AD9A1E}" type="datetime1">
               <a:rPr lang="ko-KR" altLang="en-US" smtClean="0"/>
-              <a:t>2026-01-06</a:t>
+              <a:t>2026-02-09</a:t>
             </a:fld>
             <a:endParaRPr lang="ko-KR" altLang="en-US"/>
           </a:p>
@@ -10882,7 +10971,7 @@
           <a:p>
             <a:fld id="{0E19CB95-6D28-40F1-9DA3-1BAC5D4B5B4F}" type="datetime6">
               <a:rPr lang="ko-KR" altLang="en-US" smtClean="0"/>
-              <a:t>2026년 1월</a:t>
+              <a:t>2026년 2월</a:t>
             </a:fld>
             <a:endParaRPr lang="ko-KR" altLang="en-US"/>
           </a:p>
@@ -11154,7 +11243,7 @@
           <a:p>
             <a:fld id="{0494AFCB-C0DB-4F55-97FD-8089BF192B09}" type="datetime6">
               <a:rPr lang="ko-KR" altLang="en-US" smtClean="0"/>
-              <a:t>2026년 1월</a:t>
+              <a:t>2026년 2월</a:t>
             </a:fld>
             <a:endParaRPr lang="ko-KR" altLang="en-US"/>
           </a:p>
@@ -11318,7 +11407,7 @@
           <a:p>
             <a:fld id="{5DF279EA-F481-4974-98AE-8F344014F288}" type="datetime6">
               <a:rPr lang="ko-KR" altLang="en-US" smtClean="0"/>
-              <a:t>2026년 1월</a:t>
+              <a:t>2026년 2월</a:t>
             </a:fld>
             <a:endParaRPr lang="ko-KR" altLang="en-US"/>
           </a:p>
@@ -12052,7 +12141,7 @@
           <a:p>
             <a:fld id="{61FC82DE-EC34-4C97-AFE6-318EC0DB25AA}" type="datetime6">
               <a:rPr lang="ko-KR" altLang="en-US" smtClean="0"/>
-              <a:t>2026년 1월</a:t>
+              <a:t>2026년 2월</a:t>
             </a:fld>
             <a:endParaRPr lang="ko-KR" altLang="en-US"/>
           </a:p>
@@ -12513,7 +12602,7 @@
           <a:p>
             <a:fld id="{5DF279EA-F481-4974-98AE-8F344014F288}" type="datetime6">
               <a:rPr lang="ko-KR" altLang="en-US" smtClean="0"/>
-              <a:t>2026년 1월</a:t>
+              <a:t>2026년 2월</a:t>
             </a:fld>
             <a:endParaRPr lang="ko-KR" altLang="en-US" dirty="0"/>
           </a:p>
@@ -12637,7 +12726,7 @@
           <a:p>
             <a:fld id="{DCA52560-0684-4044-BA2C-DDD26512416A}" type="datetime6">
               <a:rPr lang="ko-KR" altLang="en-US" smtClean="0"/>
-              <a:t>2026년 1월</a:t>
+              <a:t>2026년 2월</a:t>
             </a:fld>
             <a:endParaRPr lang="ko-KR" altLang="en-US"/>
           </a:p>
@@ -13129,7 +13218,7 @@
           <a:p>
             <a:fld id="{DCA52560-0684-4044-BA2C-DDD26512416A}" type="datetime6">
               <a:rPr lang="ko-KR" altLang="en-US" smtClean="0"/>
-              <a:t>2026년 1월</a:t>
+              <a:t>2026년 2월</a:t>
             </a:fld>
             <a:endParaRPr lang="ko-KR" altLang="en-US"/>
           </a:p>
@@ -13536,7 +13625,7 @@
           <a:p>
             <a:fld id="{DCA52560-0684-4044-BA2C-DDD26512416A}" type="datetime6">
               <a:rPr lang="ko-KR" altLang="en-US" smtClean="0"/>
-              <a:t>2026년 1월</a:t>
+              <a:t>2026년 2월</a:t>
             </a:fld>
             <a:endParaRPr lang="ko-KR" altLang="en-US"/>
           </a:p>
@@ -13786,7 +13875,7 @@
           <a:p>
             <a:fld id="{DCA52560-0684-4044-BA2C-DDD26512416A}" type="datetime6">
               <a:rPr lang="ko-KR" altLang="en-US" smtClean="0"/>
-              <a:t>2026년 1월</a:t>
+              <a:t>2026년 2월</a:t>
             </a:fld>
             <a:endParaRPr lang="ko-KR" altLang="en-US"/>
           </a:p>
@@ -14051,7 +14140,7 @@
           <a:p>
             <a:fld id="{0E19CB95-6D28-40F1-9DA3-1BAC5D4B5B4F}" type="datetime6">
               <a:rPr lang="ko-KR" altLang="en-US" smtClean="0"/>
-              <a:t>2026년 1월</a:t>
+              <a:t>2026년 2월</a:t>
             </a:fld>
             <a:endParaRPr lang="ko-KR" altLang="en-US"/>
           </a:p>
@@ -14180,7 +14269,7 @@
           <a:p>
             <a:fld id="{DCA52560-0684-4044-BA2C-DDD26512416A}" type="datetime6">
               <a:rPr lang="ko-KR" altLang="en-US" smtClean="0"/>
-              <a:t>2026년 1월</a:t>
+              <a:t>2026년 2월</a:t>
             </a:fld>
             <a:endParaRPr lang="ko-KR" altLang="en-US"/>
           </a:p>
@@ -14531,7 +14620,7 @@
           <a:p>
             <a:fld id="{DCA52560-0684-4044-BA2C-DDD26512416A}" type="datetime6">
               <a:rPr lang="ko-KR" altLang="en-US" smtClean="0"/>
-              <a:t>2026년 1월</a:t>
+              <a:t>2026년 2월</a:t>
             </a:fld>
             <a:endParaRPr lang="ko-KR" altLang="en-US"/>
           </a:p>
@@ -14810,7 +14899,7 @@
           <a:p>
             <a:fld id="{DCA52560-0684-4044-BA2C-DDD26512416A}" type="datetime6">
               <a:rPr lang="ko-KR" altLang="en-US" smtClean="0"/>
-              <a:t>2026년 1월</a:t>
+              <a:t>2026년 2월</a:t>
             </a:fld>
             <a:endParaRPr lang="ko-KR" altLang="en-US"/>
           </a:p>
@@ -15037,7 +15126,7 @@
           <a:p>
             <a:fld id="{0E19CB95-6D28-40F1-9DA3-1BAC5D4B5B4F}" type="datetime6">
               <a:rPr lang="ko-KR" altLang="en-US" smtClean="0"/>
-              <a:t>2026년 1월</a:t>
+              <a:t>2026년 2월</a:t>
             </a:fld>
             <a:endParaRPr lang="ko-KR" altLang="en-US"/>
           </a:p>
@@ -15150,7 +15239,7 @@
           <a:p>
             <a:fld id="{7AFDD245-6FC9-4BCD-9848-9FACA08CE32D}" type="datetime6">
               <a:rPr lang="ko-KR" altLang="en-US" smtClean="0"/>
-              <a:t>2026년 1월</a:t>
+              <a:t>2026년 2월</a:t>
             </a:fld>
             <a:endParaRPr lang="ko-KR" altLang="en-US"/>
           </a:p>
@@ -15731,7 +15820,7 @@
           <a:p>
             <a:fld id="{7C4FB1EE-E7B1-4C9E-8657-7267753DFD72}" type="datetime6">
               <a:rPr lang="ko-KR" altLang="en-US" smtClean="0"/>
-              <a:t>2026년 1월</a:t>
+              <a:t>2026년 2월</a:t>
             </a:fld>
             <a:endParaRPr lang="ko-KR" altLang="en-US"/>
           </a:p>
@@ -16026,7 +16115,7 @@
           <a:p>
             <a:fld id="{9E092EB6-6BAC-455A-B68D-8451BA06159C}" type="datetime6">
               <a:rPr lang="ko-KR" altLang="en-US" smtClean="0"/>
-              <a:t>2026년 1월</a:t>
+              <a:t>2026년 2월</a:t>
             </a:fld>
             <a:endParaRPr lang="ko-KR" altLang="en-US"/>
           </a:p>
@@ -16285,7 +16374,7 @@
           <a:p>
             <a:fld id="{9E092EB6-6BAC-455A-B68D-8451BA06159C}" type="datetime6">
               <a:rPr lang="ko-KR" altLang="en-US" smtClean="0"/>
-              <a:t>2026년 1월</a:t>
+              <a:t>2026년 2월</a:t>
             </a:fld>
             <a:endParaRPr lang="ko-KR" altLang="en-US"/>
           </a:p>
@@ -16751,7 +16840,7 @@
           <a:p>
             <a:fld id="{9E092EB6-6BAC-455A-B68D-8451BA06159C}" type="datetime6">
               <a:rPr lang="ko-KR" altLang="en-US" smtClean="0"/>
-              <a:t>2026년 1월</a:t>
+              <a:t>2026년 2월</a:t>
             </a:fld>
             <a:endParaRPr lang="ko-KR" altLang="en-US"/>
           </a:p>
@@ -17047,7 +17136,7 @@
           <a:p>
             <a:fld id="{0F78D9C4-20C1-4B15-A116-16DC77AD9A1E}" type="datetime1">
               <a:rPr lang="ko-KR" altLang="en-US" smtClean="0"/>
-              <a:t>2026-01-06</a:t>
+              <a:t>2026-02-09</a:t>
             </a:fld>
             <a:endParaRPr lang="ko-KR" altLang="en-US"/>
           </a:p>
@@ -17665,7 +17754,7 @@
           <a:p>
             <a:fld id="{ECE2EEAA-2D64-41F3-9CC6-1D2C9158BEA1}" type="datetime6">
               <a:rPr lang="ko-KR" altLang="en-US" smtClean="0"/>
-              <a:t>2026년 1월</a:t>
+              <a:t>2026년 2월</a:t>
             </a:fld>
             <a:endParaRPr lang="ko-KR" altLang="en-US" dirty="0"/>
           </a:p>
@@ -17781,7 +17870,7 @@
           <a:p>
             <a:fld id="{F5DECA0C-8384-4A80-8CAF-F40503FCCF4C}" type="datetime6">
               <a:rPr lang="ko-KR" altLang="en-US" smtClean="0"/>
-              <a:t>2026년 1월</a:t>
+              <a:t>2026년 2월</a:t>
             </a:fld>
             <a:endParaRPr lang="ko-KR" altLang="en-US"/>
           </a:p>
@@ -18037,7 +18126,7 @@
           <a:p>
             <a:fld id="{0E19CB95-6D28-40F1-9DA3-1BAC5D4B5B4F}" type="datetime6">
               <a:rPr lang="ko-KR" altLang="en-US" smtClean="0"/>
-              <a:t>2026년 1월</a:t>
+              <a:t>2026년 2월</a:t>
             </a:fld>
             <a:endParaRPr lang="ko-KR" altLang="en-US"/>
           </a:p>
@@ -18197,7 +18286,7 @@
           <a:p>
             <a:fld id="{3CDE9A52-66EB-4C85-B703-18792A161207}" type="datetime6">
               <a:rPr lang="ko-KR" altLang="en-US" smtClean="0"/>
-              <a:t>2026년 1월</a:t>
+              <a:t>2026년 2월</a:t>
             </a:fld>
             <a:endParaRPr lang="ko-KR" altLang="en-US"/>
           </a:p>
@@ -19012,7 +19101,7 @@
           <a:p>
             <a:fld id="{0B5B7C07-52EA-4677-8F9D-91072C84880F}" type="datetime6">
               <a:rPr lang="ko-KR" altLang="en-US" smtClean="0"/>
-              <a:t>2026년 1월</a:t>
+              <a:t>2026년 2월</a:t>
             </a:fld>
             <a:endParaRPr lang="ko-KR" altLang="en-US"/>
           </a:p>
@@ -19132,7 +19221,7 @@
           <a:p>
             <a:fld id="{3C9CE3CE-253F-4F9D-BA15-C226C8D8501E}" type="datetime6">
               <a:rPr lang="ko-KR" altLang="en-US" smtClean="0"/>
-              <a:t>2026년 1월</a:t>
+              <a:t>2026년 2월</a:t>
             </a:fld>
             <a:endParaRPr lang="ko-KR" altLang="en-US"/>
           </a:p>
@@ -19382,7 +19471,7 @@
           <a:p>
             <a:fld id="{3C9CE3CE-253F-4F9D-BA15-C226C8D8501E}" type="datetime6">
               <a:rPr lang="ko-KR" altLang="en-US" smtClean="0"/>
-              <a:t>2026년 1월</a:t>
+              <a:t>2026년 2월</a:t>
             </a:fld>
             <a:endParaRPr lang="ko-KR" altLang="en-US"/>
           </a:p>
@@ -19627,7 +19716,7 @@
           <a:p>
             <a:fld id="{3C9CE3CE-253F-4F9D-BA15-C226C8D8501E}" type="datetime6">
               <a:rPr lang="ko-KR" altLang="en-US" smtClean="0"/>
-              <a:t>2026년 1월</a:t>
+              <a:t>2026년 2월</a:t>
             </a:fld>
             <a:endParaRPr lang="ko-KR" altLang="en-US"/>
           </a:p>
@@ -19872,7 +19961,7 @@
           <a:p>
             <a:fld id="{3C9CE3CE-253F-4F9D-BA15-C226C8D8501E}" type="datetime6">
               <a:rPr lang="ko-KR" altLang="en-US" smtClean="0"/>
-              <a:t>2026년 1월</a:t>
+              <a:t>2026년 2월</a:t>
             </a:fld>
             <a:endParaRPr lang="ko-KR" altLang="en-US"/>
           </a:p>
@@ -20117,7 +20206,7 @@
           <a:p>
             <a:fld id="{3C9CE3CE-253F-4F9D-BA15-C226C8D8501E}" type="datetime6">
               <a:rPr lang="ko-KR" altLang="en-US" smtClean="0"/>
-              <a:t>2026년 1월</a:t>
+              <a:t>2026년 2월</a:t>
             </a:fld>
             <a:endParaRPr lang="ko-KR" altLang="en-US"/>
           </a:p>
@@ -20910,7 +20999,7 @@
           <a:p>
             <a:fld id="{36FCE367-DC36-434B-B1CF-312B3C1E9F8A}" type="datetime6">
               <a:rPr lang="ko-KR" altLang="en-US" smtClean="0"/>
-              <a:t>2026년 1월</a:t>
+              <a:t>2026년 2월</a:t>
             </a:fld>
             <a:endParaRPr lang="ko-KR" altLang="en-US"/>
           </a:p>
@@ -21169,7 +21258,7 @@
           <a:p>
             <a:fld id="{ECE2EEAA-2D64-41F3-9CC6-1D2C9158BEA1}" type="datetime6">
               <a:rPr lang="ko-KR" altLang="en-US" smtClean="0"/>
-              <a:t>2026년 1월</a:t>
+              <a:t>2026년 2월</a:t>
             </a:fld>
             <a:endParaRPr lang="ko-KR" altLang="en-US" dirty="0"/>
           </a:p>
@@ -21776,7 +21865,7 @@
           <a:p>
             <a:fld id="{0E19CB95-6D28-40F1-9DA3-1BAC5D4B5B4F}" type="datetime6">
               <a:rPr lang="ko-KR" altLang="en-US" smtClean="0"/>
-              <a:t>2026년 1월</a:t>
+              <a:t>2026년 2월</a:t>
             </a:fld>
             <a:endParaRPr lang="ko-KR" altLang="en-US"/>
           </a:p>
@@ -22266,7 +22355,7 @@
           <a:p>
             <a:fld id="{19AC1F47-7EEC-400F-A2D4-50AC284CC9C5}" type="datetime6">
               <a:rPr lang="ko-KR" altLang="en-US" smtClean="0"/>
-              <a:t>2026년 1월</a:t>
+              <a:t>2026년 2월</a:t>
             </a:fld>
             <a:endParaRPr lang="ko-KR" altLang="en-US"/>
           </a:p>
@@ -22731,7 +22820,7 @@
           <a:p>
             <a:fld id="{19AC1F47-7EEC-400F-A2D4-50AC284CC9C5}" type="datetime6">
               <a:rPr lang="ko-KR" altLang="en-US" smtClean="0"/>
-              <a:t>2026년 1월</a:t>
+              <a:t>2026년 2월</a:t>
             </a:fld>
             <a:endParaRPr lang="ko-KR" altLang="en-US"/>
           </a:p>
@@ -22923,7 +23012,7 @@
           <a:p>
             <a:fld id="{0E19CB95-6D28-40F1-9DA3-1BAC5D4B5B4F}" type="datetime6">
               <a:rPr lang="ko-KR" altLang="en-US" smtClean="0"/>
-              <a:t>2026년 1월</a:t>
+              <a:t>2026년 2월</a:t>
             </a:fld>
             <a:endParaRPr lang="ko-KR" altLang="en-US"/>
           </a:p>
@@ -23048,7 +23137,7 @@
           <a:p>
             <a:fld id="{D33B4DC5-C499-469C-A3A1-6E2BDA613C9D}" type="datetime6">
               <a:rPr lang="ko-KR" altLang="en-US" smtClean="0"/>
-              <a:t>2026년 1월</a:t>
+              <a:t>2026년 2월</a:t>
             </a:fld>
             <a:endParaRPr lang="ko-KR" altLang="en-US"/>
           </a:p>
@@ -23370,7 +23459,7 @@
           <a:p>
             <a:fld id="{D33B4DC5-C499-469C-A3A1-6E2BDA613C9D}" type="datetime6">
               <a:rPr lang="ko-KR" altLang="en-US" smtClean="0"/>
-              <a:t>2026년 1월</a:t>
+              <a:t>2026년 2월</a:t>
             </a:fld>
             <a:endParaRPr lang="ko-KR" altLang="en-US"/>
           </a:p>
@@ -23650,7 +23739,7 @@
           <a:p>
             <a:fld id="{D33B4DC5-C499-469C-A3A1-6E2BDA613C9D}" type="datetime6">
               <a:rPr lang="ko-KR" altLang="en-US" smtClean="0"/>
-              <a:t>2026년 1월</a:t>
+              <a:t>2026년 2월</a:t>
             </a:fld>
             <a:endParaRPr lang="ko-KR" altLang="en-US"/>
           </a:p>
@@ -24344,7 +24433,7 @@
           <a:p>
             <a:fld id="{0F78D9C4-20C1-4B15-A116-16DC77AD9A1E}" type="datetime1">
               <a:rPr lang="ko-KR" altLang="en-US" smtClean="0"/>
-              <a:t>2026-01-06</a:t>
+              <a:t>2026-02-09</a:t>
             </a:fld>
             <a:endParaRPr lang="ko-KR" altLang="en-US"/>
           </a:p>
@@ -24884,7 +24973,7 @@
           <a:p>
             <a:fld id="{0E19CB95-6D28-40F1-9DA3-1BAC5D4B5B4F}" type="datetime6">
               <a:rPr lang="ko-KR" altLang="en-US" smtClean="0"/>
-              <a:t>2026년 1월</a:t>
+              <a:t>2026년 2월</a:t>
             </a:fld>
             <a:endParaRPr lang="ko-KR" altLang="en-US"/>
           </a:p>
@@ -25119,7 +25208,7 @@
           <a:p>
             <a:fld id="{9251B7E4-5999-46D2-ABFA-C4AE71218798}" type="datetime6">
               <a:rPr lang="ko-KR" altLang="en-US" smtClean="0"/>
-              <a:t>2026년 1월</a:t>
+              <a:t>2026년 2월</a:t>
             </a:fld>
             <a:endParaRPr lang="ko-KR" altLang="en-US"/>
           </a:p>
@@ -25351,7 +25440,7 @@
           <a:p>
             <a:fld id="{ECE2EEAA-2D64-41F3-9CC6-1D2C9158BEA1}" type="datetime6">
               <a:rPr lang="ko-KR" altLang="en-US" smtClean="0"/>
-              <a:t>2026년 1월</a:t>
+              <a:t>2026년 2월</a:t>
             </a:fld>
             <a:endParaRPr lang="ko-KR" altLang="en-US" dirty="0"/>
           </a:p>
@@ -26027,7 +26116,7 @@
           <a:p>
             <a:fld id="{3421A513-DF9B-4535-A798-D8FDF5E9EBFC}" type="datetime6">
               <a:rPr lang="ko-KR" altLang="en-US" smtClean="0"/>
-              <a:t>2026년 1월</a:t>
+              <a:t>2026년 2월</a:t>
             </a:fld>
             <a:endParaRPr lang="ko-KR" altLang="en-US"/>
           </a:p>
@@ -26335,7 +26424,7 @@
           <a:p>
             <a:fld id="{E1557891-4B9A-4032-8720-5D09F8AF59EF}" type="datetime6">
               <a:rPr lang="ko-KR" altLang="en-US" smtClean="0"/>
-              <a:t>2026년 1월</a:t>
+              <a:t>2026년 2월</a:t>
             </a:fld>
             <a:endParaRPr lang="ko-KR" altLang="en-US"/>
           </a:p>
@@ -26482,7 +26571,7 @@
           <a:p>
             <a:fld id="{08C18425-B8BD-4F49-92E1-F68FC0687435}" type="datetime6">
               <a:rPr lang="ko-KR" altLang="en-US" smtClean="0"/>
-              <a:t>2026년 1월</a:t>
+              <a:t>2026년 2월</a:t>
             </a:fld>
             <a:endParaRPr lang="ko-KR" altLang="en-US"/>
           </a:p>
@@ -26710,7 +26799,7 @@
           <a:p>
             <a:fld id="{624D2E59-5085-4C4E-92A3-F4D9622CE4F6}" type="datetime6">
               <a:rPr lang="ko-KR" altLang="en-US" smtClean="0"/>
-              <a:t>2026년 1월</a:t>
+              <a:t>2026년 2월</a:t>
             </a:fld>
             <a:endParaRPr lang="ko-KR" altLang="en-US"/>
           </a:p>
@@ -27145,7 +27234,7 @@
           <a:p>
             <a:fld id="{27F22A39-C1C5-4537-84EB-2A2FE2122056}" type="datetime6">
               <a:rPr lang="ko-KR" altLang="en-US" smtClean="0"/>
-              <a:t>2026년 1월</a:t>
+              <a:t>2026년 2월</a:t>
             </a:fld>
             <a:endParaRPr lang="ko-KR" altLang="en-US"/>
           </a:p>
@@ -27397,7 +27486,7 @@
           <a:p>
             <a:fld id="{00C27F15-4936-4148-9CAA-FDFBD0C60B42}" type="datetime6">
               <a:rPr lang="ko-KR" altLang="en-US" smtClean="0"/>
-              <a:t>2026년 1월</a:t>
+              <a:t>2026년 2월</a:t>
             </a:fld>
             <a:endParaRPr lang="ko-KR" altLang="en-US"/>
           </a:p>
@@ -27703,7 +27792,7 @@
           <a:p>
             <a:fld id="{36BEADBC-887F-41B7-B6A7-64D6160F268F}" type="datetime6">
               <a:rPr lang="ko-KR" altLang="en-US" smtClean="0"/>
-              <a:t>2026년 1월</a:t>
+              <a:t>2026년 2월</a:t>
             </a:fld>
             <a:endParaRPr lang="ko-KR" altLang="en-US"/>
           </a:p>
@@ -28041,7 +28130,7 @@
           <a:p>
             <a:fld id="{5BEACFCF-82D4-4967-89DC-011B22F4B465}" type="datetime6">
               <a:rPr lang="ko-KR" altLang="en-US" smtClean="0"/>
-              <a:t>2026년 1월</a:t>
+              <a:t>2026년 2월</a:t>
             </a:fld>
             <a:endParaRPr lang="ko-KR" altLang="en-US"/>
           </a:p>
@@ -28188,6 +28277,381 @@
   <p:cSld>
     <p:spTree>
       <p:nvGrpSpPr>
+        <p:cNvPr id="1" name=""/>
+        <p:cNvGrpSpPr/>
+        <p:nvPr/>
+      </p:nvGrpSpPr>
+      <p:grpSpPr>
+        <a:xfrm>
+          <a:off x="0" y="0"/>
+          <a:ext cx="0" cy="0"/>
+          <a:chOff x="0" y="0"/>
+          <a:chExt cx="0" cy="0"/>
+        </a:xfrm>
+      </p:grpSpPr>
+      <p:sp>
+        <p:nvSpPr>
+          <p:cNvPr id="2" name="제목 1">
+            <a:extLst>
+              <a:ext uri="{FF2B5EF4-FFF2-40B4-BE49-F238E27FC236}">
+                <a16:creationId xmlns:a16="http://schemas.microsoft.com/office/drawing/2014/main" id="{6C705268-880D-AF4E-8A90-8B152EB81097}"/>
+              </a:ext>
+            </a:extLst>
+          </p:cNvPr>
+          <p:cNvSpPr>
+            <a:spLocks noGrp="1"/>
+          </p:cNvSpPr>
+          <p:nvPr>
+            <p:ph type="title"/>
+          </p:nvPr>
+        </p:nvSpPr>
+        <p:spPr/>
+        <p:txBody>
+          <a:bodyPr/>
+          <a:lstStyle/>
+          <a:p>
+            <a:r>
+              <a:rPr lang="en-US" altLang="ko-KR" dirty="0"/>
+              <a:t>Router</a:t>
+            </a:r>
+            <a:r>
+              <a:rPr lang="ko-KR" altLang="en-US" dirty="0"/>
+              <a:t> 실습</a:t>
+            </a:r>
+          </a:p>
+        </p:txBody>
+      </p:sp>
+      <p:sp>
+        <p:nvSpPr>
+          <p:cNvPr id="4" name="날짜 개체 틀 3">
+            <a:extLst>
+              <a:ext uri="{FF2B5EF4-FFF2-40B4-BE49-F238E27FC236}">
+                <a16:creationId xmlns:a16="http://schemas.microsoft.com/office/drawing/2014/main" id="{6EE9B434-8977-A422-69B8-4F63EBA503FB}"/>
+              </a:ext>
+            </a:extLst>
+          </p:cNvPr>
+          <p:cNvSpPr>
+            <a:spLocks noGrp="1"/>
+          </p:cNvSpPr>
+          <p:nvPr>
+            <p:ph type="dt" sz="half" idx="10"/>
+          </p:nvPr>
+        </p:nvSpPr>
+        <p:spPr/>
+        <p:txBody>
+          <a:bodyPr/>
+          <a:lstStyle/>
+          <a:p>
+            <a:fld id="{BCE0051F-F792-4E9D-A451-797DF61F9CA9}" type="datetime6">
+              <a:rPr lang="ko-KR" altLang="en-US" smtClean="0"/>
+              <a:t>2026년 2월</a:t>
+            </a:fld>
+            <a:endParaRPr lang="ko-KR" altLang="en-US"/>
+          </a:p>
+        </p:txBody>
+      </p:sp>
+      <p:sp>
+        <p:nvSpPr>
+          <p:cNvPr id="5" name="슬라이드 번호 개체 틀 4">
+            <a:extLst>
+              <a:ext uri="{FF2B5EF4-FFF2-40B4-BE49-F238E27FC236}">
+                <a16:creationId xmlns:a16="http://schemas.microsoft.com/office/drawing/2014/main" id="{75E3E9B0-C628-12AF-B688-62BAA3A8B414}"/>
+              </a:ext>
+            </a:extLst>
+          </p:cNvPr>
+          <p:cNvSpPr>
+            <a:spLocks noGrp="1"/>
+          </p:cNvSpPr>
+          <p:nvPr>
+            <p:ph type="sldNum" sz="quarter" idx="12"/>
+          </p:nvPr>
+        </p:nvSpPr>
+        <p:spPr/>
+        <p:txBody>
+          <a:bodyPr/>
+          <a:lstStyle/>
+          <a:p>
+            <a:fld id="{083A2CE0-18CD-4102-B738-4ACFF9E68BA4}" type="slidenum">
+              <a:rPr lang="ko-KR" altLang="en-US" smtClean="0"/>
+              <a:t>68</a:t>
+            </a:fld>
+            <a:endParaRPr lang="ko-KR" altLang="en-US" dirty="0"/>
+          </a:p>
+        </p:txBody>
+      </p:sp>
+      <p:sp>
+        <p:nvSpPr>
+          <p:cNvPr id="3" name="내용 개체 틀 2">
+            <a:extLst>
+              <a:ext uri="{FF2B5EF4-FFF2-40B4-BE49-F238E27FC236}">
+                <a16:creationId xmlns:a16="http://schemas.microsoft.com/office/drawing/2014/main" id="{317B1316-1F01-A547-2C0A-66500E99699F}"/>
+              </a:ext>
+            </a:extLst>
+          </p:cNvPr>
+          <p:cNvSpPr>
+            <a:spLocks noGrp="1"/>
+          </p:cNvSpPr>
+          <p:nvPr>
+            <p:ph idx="1"/>
+          </p:nvPr>
+        </p:nvSpPr>
+        <p:spPr/>
+        <p:txBody>
+          <a:bodyPr/>
+          <a:lstStyle/>
+          <a:p>
+            <a:r>
+              <a:rPr lang="en-US" altLang="ko-KR" dirty="0"/>
+              <a:t>navbar </a:t>
+            </a:r>
+            <a:r>
+              <a:rPr lang="ko-KR" altLang="en-US" dirty="0"/>
+              <a:t>코드는 다음과 같을 때</a:t>
+            </a:r>
+            <a:r>
+              <a:rPr lang="en-US" altLang="ko-KR" dirty="0"/>
+              <a:t>,</a:t>
+            </a:r>
+            <a:br>
+              <a:rPr lang="en-US" altLang="ko-KR" dirty="0"/>
+            </a:br>
+            <a:r>
+              <a:rPr lang="ko-KR" altLang="en-US" dirty="0"/>
+              <a:t>실행 영상을 참고하여 </a:t>
+            </a:r>
+            <a:r>
+              <a:rPr lang="en-US" altLang="ko-KR" dirty="0"/>
+              <a:t>router </a:t>
+            </a:r>
+            <a:r>
+              <a:rPr lang="ko-KR" altLang="en-US" dirty="0"/>
+              <a:t>설정하기</a:t>
+            </a:r>
+            <a:endParaRPr lang="en-US" altLang="ko-KR" dirty="0"/>
+          </a:p>
+        </p:txBody>
+      </p:sp>
+      <p:pic>
+        <p:nvPicPr>
+          <p:cNvPr id="7" name="그림 6">
+            <a:extLst>
+              <a:ext uri="{FF2B5EF4-FFF2-40B4-BE49-F238E27FC236}">
+                <a16:creationId xmlns:a16="http://schemas.microsoft.com/office/drawing/2014/main" id="{80BA4522-08EE-4DEF-DDD4-33BF877C6261}"/>
+              </a:ext>
+            </a:extLst>
+          </p:cNvPr>
+          <p:cNvPicPr>
+            <a:picLocks noChangeAspect="1"/>
+          </p:cNvPicPr>
+          <p:nvPr/>
+        </p:nvPicPr>
+        <p:blipFill>
+          <a:blip r:embed="rId5"/>
+          <a:stretch>
+            <a:fillRect/>
+          </a:stretch>
+        </p:blipFill>
+        <p:spPr>
+          <a:xfrm>
+            <a:off x="6947793" y="1491648"/>
+            <a:ext cx="4992419" cy="4019168"/>
+          </a:xfrm>
+          <a:prstGeom prst="rect">
+            <a:avLst/>
+          </a:prstGeom>
+        </p:spPr>
+      </p:pic>
+      <p:pic>
+        <p:nvPicPr>
+          <p:cNvPr id="9" name="실습60_실행영상">
+            <a:hlinkClick r:id="" action="ppaction://media"/>
+            <a:extLst>
+              <a:ext uri="{FF2B5EF4-FFF2-40B4-BE49-F238E27FC236}">
+                <a16:creationId xmlns:a16="http://schemas.microsoft.com/office/drawing/2014/main" id="{D5AC891B-9571-BF51-3F2B-500B108D312F}"/>
+              </a:ext>
+            </a:extLst>
+          </p:cNvPr>
+          <p:cNvPicPr>
+            <a:picLocks noChangeAspect="1"/>
+          </p:cNvPicPr>
+          <p:nvPr>
+            <a:videoFile r:link="rId2"/>
+            <p:extLst>
+              <p:ext uri="{DAA4B4D4-6D71-4841-9C94-3DE7FCFB9230}">
+                <p14:media xmlns:p14="http://schemas.microsoft.com/office/powerpoint/2010/main" r:embed="rId1"/>
+              </p:ext>
+            </p:extLst>
+          </p:nvPr>
+        </p:nvPicPr>
+        <p:blipFill>
+          <a:blip r:embed="rId6"/>
+          <a:stretch>
+            <a:fillRect/>
+          </a:stretch>
+        </p:blipFill>
+        <p:spPr>
+          <a:xfrm>
+            <a:off x="1210387" y="2862770"/>
+            <a:ext cx="5150994" cy="2648046"/>
+          </a:xfrm>
+          <a:prstGeom prst="rect">
+            <a:avLst/>
+          </a:prstGeom>
+        </p:spPr>
+      </p:pic>
+    </p:spTree>
+    <p:extLst>
+      <p:ext uri="{BB962C8B-B14F-4D97-AF65-F5344CB8AC3E}">
+        <p14:creationId xmlns:p14="http://schemas.microsoft.com/office/powerpoint/2010/main" val="2854463142"/>
+      </p:ext>
+    </p:extLst>
+  </p:cSld>
+  <p:clrMapOvr>
+    <a:masterClrMapping/>
+  </p:clrMapOvr>
+  <p:timing>
+    <p:tnLst>
+      <p:par>
+        <p:cTn id="1" dur="indefinite" restart="never" nodeType="tmRoot">
+          <p:childTnLst>
+            <p:seq concurrent="1" nextAc="seek">
+              <p:cTn id="2" dur="indefinite" nodeType="mainSeq">
+                <p:childTnLst>
+                  <p:par>
+                    <p:cTn id="3" fill="hold">
+                      <p:stCondLst>
+                        <p:cond delay="indefinite"/>
+                      </p:stCondLst>
+                      <p:childTnLst>
+                        <p:par>
+                          <p:cTn id="4" fill="hold">
+                            <p:stCondLst>
+                              <p:cond delay="0"/>
+                            </p:stCondLst>
+                            <p:childTnLst>
+                              <p:par>
+                                <p:cTn id="5" presetID="1" presetClass="mediacall" presetSubtype="0" fill="hold" nodeType="clickEffect">
+                                  <p:stCondLst>
+                                    <p:cond delay="0"/>
+                                  </p:stCondLst>
+                                  <p:childTnLst>
+                                    <p:cmd type="call" cmd="playFrom(0.0)">
+                                      <p:cBhvr>
+                                        <p:cTn id="6" dur="20573" fill="hold"/>
+                                        <p:tgtEl>
+                                          <p:spTgt spid="9"/>
+                                        </p:tgtEl>
+                                      </p:cBhvr>
+                                    </p:cmd>
+                                  </p:childTnLst>
+                                </p:cTn>
+                              </p:par>
+                            </p:childTnLst>
+                          </p:cTn>
+                        </p:par>
+                      </p:childTnLst>
+                    </p:cTn>
+                  </p:par>
+                </p:childTnLst>
+              </p:cTn>
+              <p:prevCondLst>
+                <p:cond evt="onPrev" delay="0">
+                  <p:tgtEl>
+                    <p:sldTgt/>
+                  </p:tgtEl>
+                </p:cond>
+              </p:prevCondLst>
+              <p:nextCondLst>
+                <p:cond evt="onNext" delay="0">
+                  <p:tgtEl>
+                    <p:sldTgt/>
+                  </p:tgtEl>
+                </p:cond>
+              </p:nextCondLst>
+            </p:seq>
+            <p:seq concurrent="1" nextAc="seek">
+              <p:cTn id="7" restart="whenNotActive" fill="hold" evtFilter="cancelBubble" nodeType="interactiveSeq">
+                <p:stCondLst>
+                  <p:cond evt="onClick" delay="0">
+                    <p:tgtEl>
+                      <p:spTgt spid="9"/>
+                    </p:tgtEl>
+                  </p:cond>
+                </p:stCondLst>
+                <p:endSync evt="end" delay="0">
+                  <p:rtn val="all"/>
+                </p:endSync>
+                <p:childTnLst>
+                  <p:par>
+                    <p:cTn id="8" fill="hold">
+                      <p:stCondLst>
+                        <p:cond delay="0"/>
+                      </p:stCondLst>
+                      <p:childTnLst>
+                        <p:par>
+                          <p:cTn id="9" fill="hold">
+                            <p:stCondLst>
+                              <p:cond delay="0"/>
+                            </p:stCondLst>
+                            <p:childTnLst>
+                              <p:par>
+                                <p:cTn id="10" presetID="2" presetClass="mediacall" presetSubtype="0" fill="hold" nodeType="clickEffect">
+                                  <p:stCondLst>
+                                    <p:cond delay="0"/>
+                                  </p:stCondLst>
+                                  <p:childTnLst>
+                                    <p:cmd type="call" cmd="togglePause">
+                                      <p:cBhvr>
+                                        <p:cTn id="11" dur="1" fill="hold"/>
+                                        <p:tgtEl>
+                                          <p:spTgt spid="9"/>
+                                        </p:tgtEl>
+                                      </p:cBhvr>
+                                    </p:cmd>
+                                  </p:childTnLst>
+                                </p:cTn>
+                              </p:par>
+                            </p:childTnLst>
+                          </p:cTn>
+                        </p:par>
+                      </p:childTnLst>
+                    </p:cTn>
+                  </p:par>
+                </p:childTnLst>
+              </p:cTn>
+              <p:nextCondLst>
+                <p:cond evt="onClick" delay="0">
+                  <p:tgtEl>
+                    <p:spTgt spid="9"/>
+                  </p:tgtEl>
+                </p:cond>
+              </p:nextCondLst>
+            </p:seq>
+            <p:video>
+              <p:cMediaNode vol="80000">
+                <p:cTn id="12" fill="hold" display="0">
+                  <p:stCondLst>
+                    <p:cond delay="indefinite"/>
+                  </p:stCondLst>
+                </p:cTn>
+                <p:tgtEl>
+                  <p:spTgt spid="9"/>
+                </p:tgtEl>
+              </p:cMediaNode>
+            </p:video>
+          </p:childTnLst>
+        </p:cTn>
+      </p:par>
+    </p:tnLst>
+  </p:timing>
+</p:sld>
+</file>
+
+<file path=ppt/slides/slide69.xml><?xml version="1.0" encoding="utf-8"?>
+<p:sld xmlns:a="http://schemas.openxmlformats.org/drawingml/2006/main" xmlns:r="http://schemas.openxmlformats.org/officeDocument/2006/relationships" xmlns:p="http://schemas.openxmlformats.org/presentationml/2006/main">
+  <p:cSld>
+    <p:spTree>
+      <p:nvGrpSpPr>
         <p:cNvPr id="1" name="">
           <a:extLst>
             <a:ext uri="{FF2B5EF4-FFF2-40B4-BE49-F238E27FC236}">
@@ -28398,7 +28862,7 @@
           <a:p>
             <a:fld id="{ECE2EEAA-2D64-41F3-9CC6-1D2C9158BEA1}" type="datetime6">
               <a:rPr lang="ko-KR" altLang="en-US" smtClean="0"/>
-              <a:t>2026년 1월</a:t>
+              <a:t>2026년 2월</a:t>
             </a:fld>
             <a:endParaRPr lang="ko-KR" altLang="en-US" dirty="0"/>
           </a:p>
